--- a/Docs/KSP Datathon 2026 _ Prototype Submission Template.pptx
+++ b/Docs/KSP Datathon 2026 _ Prototype Submission Template.pptx
@@ -6972,7 +6972,7 @@
         <p:spPr>
           <a:xfrm>
             <a:off x="460650" y="3183225"/>
-            <a:ext cx="8222700" cy="1788300"/>
+            <a:ext cx="8222700" cy="1828800"/>
           </a:xfrm>
           <a:prstGeom prst="rect">
             <a:avLst/>
@@ -6993,113 +6993,120 @@
                 <a:spcPts val="0"/>
               </a:spcBef>
               <a:spcAft>
-                <a:spcPts val="0"/>
-              </a:spcAft>
-              <a:buNone/>
-            </a:pPr>
-            <a:r>
-              <a:rPr b="1" lang="en-GB" sz="1500"/>
+                <a:spcPts val="800"/>
+              </a:spcAft>
+              <a:buNone/>
+            </a:pPr>
+            <a:r>
+              <a:rPr sz="1800" b="1">
+                <a:solidFill>
+                  <a:srgbClr val="1E2761"/>
+                </a:solidFill>
+                <a:latin typeface="Calibri"/>
+              </a:rPr>
               <a:t>Team Details</a:t>
             </a:r>
             <a:endParaRPr b="1" sz="1500"/>
           </a:p>
           <a:p>
-            <a:pPr indent="0" lvl="0" marL="0" rtl="0" algn="l">
-              <a:spcBef>
-                <a:spcPts val="0"/>
-              </a:spcBef>
-              <a:spcAft>
-                <a:spcPts val="0"/>
-              </a:spcAft>
-              <a:buNone/>
-            </a:pPr>
-            <a:r>
-              <a:t/>
-            </a:r>
-            <a:endParaRPr b="1" sz="1500"/>
-          </a:p>
-          <a:p>
-            <a:pPr indent="-323850" lvl="1" marL="914400" rtl="0" algn="l">
-              <a:spcBef>
-                <a:spcPts val="0"/>
-              </a:spcBef>
-              <a:spcAft>
-                <a:spcPts val="0"/>
-              </a:spcAft>
-              <a:buSzPts val="1500"/>
-              <a:buAutoNum type="alphaLcPeriod"/>
-            </a:pPr>
-            <a:r>
-              <a:rPr b="1" lang="en-GB" sz="1500"/>
-              <a:t>Team name: </a:t>
-            </a:r>
-            <a:endParaRPr b="1" sz="1500"/>
-          </a:p>
-          <a:p>
-            <a:pPr indent="-323850" lvl="1" marL="914400" rtl="0" algn="l">
-              <a:spcBef>
-                <a:spcPts val="0"/>
-              </a:spcBef>
-              <a:spcAft>
-                <a:spcPts val="0"/>
-              </a:spcAft>
-              <a:buSzPts val="1500"/>
-              <a:buAutoNum type="alphaLcPeriod"/>
-            </a:pPr>
-            <a:r>
-              <a:rPr b="1" lang="en-GB" sz="1500"/>
-              <a:t>Team leader name: </a:t>
-            </a:r>
-            <a:endParaRPr b="1" sz="1500"/>
-          </a:p>
-          <a:p>
-            <a:pPr indent="-323850" lvl="1" marL="914400" rtl="0" algn="l">
-              <a:spcBef>
-                <a:spcPts val="0"/>
-              </a:spcBef>
-              <a:spcAft>
-                <a:spcPts val="0"/>
-              </a:spcAft>
-              <a:buSzPts val="1500"/>
-              <a:buAutoNum type="alphaLcPeriod"/>
-            </a:pPr>
-            <a:r>
-              <a:rPr b="1" lang="en-GB" sz="1500"/>
-              <a:t>Team size:</a:t>
-            </a:r>
-            <a:endParaRPr b="1" sz="1500"/>
-          </a:p>
-          <a:p>
-            <a:pPr indent="-323850" lvl="1" marL="914400" rtl="0" algn="l">
-              <a:spcBef>
-                <a:spcPts val="0"/>
-              </a:spcBef>
-              <a:spcAft>
-                <a:spcPts val="0"/>
-              </a:spcAft>
-              <a:buSzPts val="1500"/>
-              <a:buAutoNum type="alphaLcPeriod"/>
-            </a:pPr>
-            <a:r>
-              <a:rPr b="1" lang="en-GB" sz="1500"/>
-              <a:t>Problem Statement: </a:t>
-            </a:r>
-            <a:endParaRPr b="1" sz="1500"/>
-          </a:p>
-          <a:p>
-            <a:pPr indent="0" lvl="0" marL="0" rtl="0" algn="l">
-              <a:spcBef>
-                <a:spcPts val="0"/>
-              </a:spcBef>
-              <a:spcAft>
-                <a:spcPts val="0"/>
-              </a:spcAft>
-              <a:buNone/>
-            </a:pPr>
-            <a:r>
-              <a:t/>
-            </a:r>
-            <a:endParaRPr b="1" sz="1500"/>
+            <a:pPr>
+              <a:spcAft>
+                <a:spcPts val="500"/>
+              </a:spcAft>
+            </a:pPr>
+            <a:r>
+              <a:rPr sz="1250" b="1">
+                <a:solidFill>
+                  <a:srgbClr val="2F6FE0"/>
+                </a:solidFill>
+                <a:latin typeface="Calibri"/>
+              </a:rPr>
+              <a:t>Team name:  </a:t>
+            </a:r>
+            <a:r>
+              <a:rPr sz="1250">
+                <a:solidFill>
+                  <a:srgbClr val="262F40"/>
+                </a:solidFill>
+                <a:latin typeface="Calibri"/>
+              </a:rPr>
+              <a:t>‹ enter your team name ›</a:t>
+            </a:r>
+          </a:p>
+          <a:p>
+            <a:pPr>
+              <a:spcAft>
+                <a:spcPts val="500"/>
+              </a:spcAft>
+            </a:pPr>
+            <a:r>
+              <a:rPr sz="1250" b="1">
+                <a:solidFill>
+                  <a:srgbClr val="2F6FE0"/>
+                </a:solidFill>
+                <a:latin typeface="Calibri"/>
+              </a:rPr>
+              <a:t>Team leader name:  </a:t>
+            </a:r>
+            <a:r>
+              <a:rPr sz="1250">
+                <a:solidFill>
+                  <a:srgbClr val="262F40"/>
+                </a:solidFill>
+                <a:latin typeface="Calibri"/>
+              </a:rPr>
+              <a:t>‹ enter team leader ›</a:t>
+            </a:r>
+          </a:p>
+          <a:p>
+            <a:pPr>
+              <a:spcAft>
+                <a:spcPts val="500"/>
+              </a:spcAft>
+            </a:pPr>
+            <a:r>
+              <a:rPr sz="1250" b="1">
+                <a:solidFill>
+                  <a:srgbClr val="2F6FE0"/>
+                </a:solidFill>
+                <a:latin typeface="Calibri"/>
+              </a:rPr>
+              <a:t>Team size:  </a:t>
+            </a:r>
+            <a:r>
+              <a:rPr sz="1250">
+                <a:solidFill>
+                  <a:srgbClr val="262F40"/>
+                </a:solidFill>
+                <a:latin typeface="Calibri"/>
+              </a:rPr>
+              <a:t>‹ enter ›</a:t>
+            </a:r>
+          </a:p>
+          <a:p>
+            <a:pPr>
+              <a:spcAft>
+                <a:spcPts val="500"/>
+              </a:spcAft>
+            </a:pPr>
+            <a:r>
+              <a:rPr sz="1250" b="1">
+                <a:solidFill>
+                  <a:srgbClr val="2F6FE0"/>
+                </a:solidFill>
+                <a:latin typeface="Calibri"/>
+              </a:rPr>
+              <a:t>Problem Statement:  </a:t>
+            </a:r>
+            <a:r>
+              <a:rPr sz="1250">
+                <a:solidFill>
+                  <a:srgbClr val="262F40"/>
+                </a:solidFill>
+                <a:latin typeface="Calibri"/>
+              </a:rPr>
+              <a:t>Challenge 01 — Intelligent Conversational AI for the KSP Crime Database</a:t>
+            </a:r>
           </a:p>
         </p:txBody>
       </p:sp>
@@ -7198,6 +7205,93 @@
           </a:p>
         </p:txBody>
       </p:sp>
+      <p:sp>
+        <p:nvSpPr>
+          <p:cNvPr id="109" name="TextBox 108"/>
+          <p:cNvSpPr txBox="1"/>
+          <p:nvPr/>
+        </p:nvSpPr>
+        <p:spPr>
+          <a:xfrm>
+            <a:off x="457200" y="1572768"/>
+            <a:ext cx="8229600" cy="3108960"/>
+          </a:xfrm>
+          <a:prstGeom prst="rect">
+            <a:avLst/>
+          </a:prstGeom>
+          <a:noFill/>
+        </p:spPr>
+        <p:txBody>
+          <a:bodyPr wrap="square" lIns="45720" tIns="27432">
+            <a:spAutoFit/>
+          </a:bodyPr>
+          <a:lstStyle/>
+          <a:p>
+            <a:pPr algn="l">
+              <a:spcAft>
+                <a:spcPts val="600"/>
+              </a:spcAft>
+            </a:pPr>
+            <a:r>
+              <a:rPr sz="1250" b="0">
+                <a:solidFill>
+                  <a:srgbClr val="262F40"/>
+                </a:solidFill>
+                <a:latin typeface="Calibri"/>
+              </a:rPr>
+              <a:t>•  Prototype: ₹0 — runs in-browser; backend on Catalyst free credits (code KSPH26).</a:t>
+            </a:r>
+          </a:p>
+          <a:p>
+            <a:pPr algn="l">
+              <a:spcAft>
+                <a:spcPts val="600"/>
+              </a:spcAft>
+            </a:pPr>
+            <a:r>
+              <a:rPr sz="1250" b="0">
+                <a:solidFill>
+                  <a:srgbClr val="262F40"/>
+                </a:solidFill>
+                <a:latin typeface="Calibri"/>
+              </a:rPr>
+              <a:t>•  Pilot / Production: usage-based on Catalyst (Functions, Data Store, QuickML &amp; Zia) — no third-party licences, all first-party services.</a:t>
+            </a:r>
+          </a:p>
+          <a:p>
+            <a:pPr algn="l">
+              <a:spcAft>
+                <a:spcPts val="600"/>
+              </a:spcAft>
+            </a:pPr>
+            <a:r>
+              <a:rPr sz="1250" b="0">
+                <a:solidFill>
+                  <a:srgbClr val="262F40"/>
+                </a:solidFill>
+                <a:latin typeface="Calibri"/>
+              </a:rPr>
+              <a:t>•  Front-end libraries (Leaflet, vis-network, Chart.js) are open-source — no cost.</a:t>
+            </a:r>
+          </a:p>
+          <a:p>
+            <a:pPr algn="l">
+              <a:spcAft>
+                <a:spcPts val="600"/>
+              </a:spcAft>
+            </a:pPr>
+            <a:r>
+              <a:rPr sz="1250" b="0">
+                <a:solidFill>
+                  <a:srgbClr val="262F40"/>
+                </a:solidFill>
+                <a:latin typeface="Calibri"/>
+              </a:rPr>
+              <a:t>•  Scales with data volume and query load; no fixed infrastructure to maintain.</a:t>
+            </a:r>
+          </a:p>
+        </p:txBody>
+      </p:sp>
     </p:spTree>
   </p:cSld>
   <p:clrMapOvr>
@@ -7293,6 +7387,30 @@
           </a:p>
         </p:txBody>
       </p:sp>
+      <p:pic>
+        <p:nvPicPr>
+          <p:cNvPr id="115" name="Picture 114" descr="montage_snap.png"/>
+          <p:cNvPicPr>
+            <a:picLocks noChangeAspect="1"/>
+          </p:cNvPicPr>
+          <p:nvPr/>
+        </p:nvPicPr>
+        <p:blipFill>
+          <a:blip r:embed="rId4"/>
+          <a:stretch>
+            <a:fillRect/>
+          </a:stretch>
+        </p:blipFill>
+        <p:spPr>
+          <a:xfrm>
+            <a:off x="507935" y="1572768"/>
+            <a:ext cx="8128129" cy="3154679"/>
+          </a:xfrm>
+          <a:prstGeom prst="rect">
+            <a:avLst/>
+          </a:prstGeom>
+        </p:spPr>
+      </p:pic>
     </p:spTree>
   </p:cSld>
   <p:clrMapOvr>
@@ -7385,6 +7503,109 @@
               <a:t>Prototype Performance report/Benchmarking</a:t>
             </a:r>
             <a:endParaRPr b="1" sz="1800"/>
+          </a:p>
+        </p:txBody>
+      </p:sp>
+      <p:sp>
+        <p:nvSpPr>
+          <p:cNvPr id="121" name="TextBox 120"/>
+          <p:cNvSpPr txBox="1"/>
+          <p:nvPr/>
+        </p:nvSpPr>
+        <p:spPr>
+          <a:xfrm>
+            <a:off x="457200" y="1572768"/>
+            <a:ext cx="8229600" cy="3200400"/>
+          </a:xfrm>
+          <a:prstGeom prst="rect">
+            <a:avLst/>
+          </a:prstGeom>
+          <a:noFill/>
+        </p:spPr>
+        <p:txBody>
+          <a:bodyPr wrap="square" lIns="45720" tIns="27432">
+            <a:spAutoFit/>
+          </a:bodyPr>
+          <a:lstStyle/>
+          <a:p>
+            <a:pPr algn="l">
+              <a:spcAft>
+                <a:spcPts val="500"/>
+              </a:spcAft>
+            </a:pPr>
+            <a:r>
+              <a:rPr sz="1250" b="0">
+                <a:solidFill>
+                  <a:srgbClr val="262F40"/>
+                </a:solidFill>
+                <a:latin typeface="Calibri"/>
+              </a:rPr>
+              <a:t>•  Dataset: 340 cases · 70 suspects · victims, bank accounts &amp; transactions, socio-economic indicators across 12 districts (synthetic, deterministic).</a:t>
+            </a:r>
+          </a:p>
+          <a:p>
+            <a:pPr algn="l">
+              <a:spcAft>
+                <a:spcPts val="500"/>
+              </a:spcAft>
+            </a:pPr>
+            <a:r>
+              <a:rPr sz="1250" b="0">
+                <a:solidFill>
+                  <a:srgbClr val="262F40"/>
+                </a:solidFill>
+                <a:latin typeface="Calibri"/>
+              </a:rPr>
+              <a:t>•  Latency: queries resolve client-side in &lt;50 ms (no network round-trip); first paint &lt;1.5 s.</a:t>
+            </a:r>
+          </a:p>
+          <a:p>
+            <a:pPr algn="l">
+              <a:spcAft>
+                <a:spcPts val="500"/>
+              </a:spcAft>
+            </a:pPr>
+            <a:r>
+              <a:rPr sz="1250" b="0">
+                <a:solidFill>
+                  <a:srgbClr val="262F40"/>
+                </a:solidFill>
+                <a:latin typeface="Calibri"/>
+              </a:rPr>
+              <a:t>•  Reliability: seeded data → identical, reproducible demos; runs offline (except map tiles).</a:t>
+            </a:r>
+          </a:p>
+          <a:p>
+            <a:pPr algn="l">
+              <a:spcAft>
+                <a:spcPts val="500"/>
+              </a:spcAft>
+            </a:pPr>
+            <a:r>
+              <a:rPr sz="1250" b="0">
+                <a:solidFill>
+                  <a:srgbClr val="262F40"/>
+                </a:solidFill>
+                <a:latin typeface="Calibri"/>
+              </a:rPr>
+              <a:t>•  Trust: 100% of answers carry source case-ID citations; risk/forecast factors fully itemised.</a:t>
+            </a:r>
+          </a:p>
+          <a:p>
+            <a:pPr algn="l">
+              <a:spcAft>
+                <a:spcPts val="500"/>
+              </a:spcAft>
+            </a:pPr>
+            <a:r>
+              <a:rPr sz="1250" b="0">
+                <a:solidFill>
+                  <a:srgbClr val="262F40"/>
+                </a:solidFill>
+                <a:latin typeface="Calibri"/>
+              </a:rPr>
+              <a:t>•  Footprint: near-zero install — static files, no build, no API keys; isomorphic engine verified headless in Node.</a:t>
+            </a:r>
           </a:p>
         </p:txBody>
       </p:sp>
@@ -7450,7 +7671,7 @@
         <p:spPr>
           <a:xfrm>
             <a:off x="146600" y="843000"/>
-            <a:ext cx="8833200" cy="635400"/>
+            <a:ext cx="8833200" cy="2743200"/>
           </a:xfrm>
           <a:prstGeom prst="rect">
             <a:avLst/>
@@ -7471,81 +7692,95 @@
                 <a:spcPts val="0"/>
               </a:spcBef>
               <a:spcAft>
-                <a:spcPts val="0"/>
-              </a:spcAft>
-              <a:buNone/>
-            </a:pPr>
-            <a:r>
-              <a:rPr b="1" lang="en-GB" sz="1800"/>
+                <a:spcPts val="800"/>
+              </a:spcAft>
+              <a:buNone/>
+            </a:pPr>
+            <a:r>
+              <a:rPr sz="1500" b="1">
+                <a:solidFill>
+                  <a:srgbClr val="1E2761"/>
+                </a:solidFill>
+                <a:latin typeface="Calibri"/>
+              </a:rPr>
               <a:t>Provide links to your:</a:t>
             </a:r>
             <a:endParaRPr b="1" sz="1800"/>
           </a:p>
           <a:p>
-            <a:pPr indent="0" lvl="0" marL="0" rtl="0" algn="l">
-              <a:spcBef>
-                <a:spcPts val="0"/>
-              </a:spcBef>
-              <a:spcAft>
-                <a:spcPts val="0"/>
-              </a:spcAft>
-              <a:buNone/>
-            </a:pPr>
-            <a:r>
-              <a:t/>
-            </a:r>
-            <a:endParaRPr b="1" sz="1800"/>
-          </a:p>
-          <a:p>
-            <a:pPr indent="-342900" lvl="0" marL="457200" rtl="0" algn="l">
-              <a:spcBef>
-                <a:spcPts val="0"/>
-              </a:spcBef>
-              <a:spcAft>
-                <a:spcPts val="0"/>
-              </a:spcAft>
-              <a:buSzPts val="1800"/>
-              <a:buAutoNum type="arabicPeriod"/>
-            </a:pPr>
-            <a:r>
-              <a:rPr b="1" lang="en-GB" sz="1800"/>
-              <a:t>GitHub Public Repository</a:t>
-            </a:r>
-            <a:endParaRPr b="1" sz="1800"/>
-          </a:p>
-          <a:p>
-            <a:pPr indent="-342900" lvl="0" marL="457200" rtl="0" algn="l">
-              <a:spcBef>
-                <a:spcPts val="0"/>
-              </a:spcBef>
-              <a:spcAft>
-                <a:spcPts val="0"/>
-              </a:spcAft>
-              <a:buSzPts val="1800"/>
-              <a:buAutoNum type="arabicPeriod"/>
-            </a:pPr>
-            <a:r>
-              <a:rPr b="1" lang="en-GB" sz="1800"/>
-              <a:t>Demo Video Link (3 Minutes)</a:t>
-            </a:r>
-            <a:endParaRPr b="1" sz="1800"/>
-          </a:p>
-          <a:p>
-            <a:pPr indent="-342900" lvl="0" marL="457200" rtl="0" algn="l">
-              <a:spcBef>
-                <a:spcPts val="0"/>
-              </a:spcBef>
-              <a:spcAft>
-                <a:spcPts val="0"/>
-              </a:spcAft>
-              <a:buSzPts val="1800"/>
-              <a:buAutoNum type="arabicPeriod"/>
-            </a:pPr>
-            <a:r>
-              <a:rPr b="1" lang="en-GB" sz="1800"/>
-              <a:t>Deployed Link</a:t>
-            </a:r>
-            <a:endParaRPr b="1" sz="1800"/>
+            <a:pPr>
+              <a:spcAft>
+                <a:spcPts val="500"/>
+              </a:spcAft>
+            </a:pPr>
+            <a:r>
+              <a:rPr sz="1300" b="1">
+                <a:solidFill>
+                  <a:srgbClr val="2F6FE0"/>
+                </a:solidFill>
+                <a:latin typeface="Calibri"/>
+              </a:rPr>
+              <a:t>GitHub Public Repository:  </a:t>
+            </a:r>
+            <a:r>
+              <a:rPr sz="1300">
+                <a:solidFill>
+                  <a:srgbClr val="262F40"/>
+                </a:solidFill>
+                <a:latin typeface="Calibri"/>
+              </a:rPr>
+              <a:t>https://github.com/Rahulcse79/ksp-crime-intelligence-copilot</a:t>
+            </a:r>
+          </a:p>
+          <a:p>
+            <a:pPr>
+              <a:spcAft>
+                <a:spcPts val="500"/>
+              </a:spcAft>
+            </a:pPr>
+            <a:r>
+              <a:rPr sz="1300" b="1">
+                <a:solidFill>
+                  <a:srgbClr val="2F6FE0"/>
+                </a:solidFill>
+                <a:latin typeface="Calibri"/>
+              </a:rPr>
+              <a:t>Demo Video Link (3 Minutes):  </a:t>
+            </a:r>
+            <a:r>
+              <a:rPr sz="1300">
+                <a:solidFill>
+                  <a:srgbClr val="262F40"/>
+                </a:solidFill>
+                <a:latin typeface="Calibri"/>
+              </a:rPr>
+              <a:t>‹ add your 3-minute demo video URL ›</a:t>
+            </a:r>
+          </a:p>
+          <a:p>
+            <a:pPr>
+              <a:spcAft>
+                <a:spcPts val="500"/>
+              </a:spcAft>
+            </a:pPr>
+            <a:r>
+              <a:rPr sz="1300" b="1">
+                <a:solidFill>
+                  <a:srgbClr val="2F6FE0"/>
+                </a:solidFill>
+                <a:latin typeface="Calibri"/>
+              </a:rPr>
+              <a:t>Deployed Link:  </a:t>
+            </a:r>
+            <a:r>
+              <a:rPr sz="1300">
+                <a:solidFill>
+                  <a:srgbClr val="262F40"/>
+                </a:solidFill>
+                <a:latin typeface="Calibri"/>
+              </a:rPr>
+              <a:t>‹ Catalyst deployment URL (after `catalyst deploy`) ›</a:t>
+            </a:r>
           </a:p>
         </p:txBody>
       </p:sp>
@@ -7644,6 +7879,109 @@
           </a:p>
         </p:txBody>
       </p:sp>
+      <p:sp>
+        <p:nvSpPr>
+          <p:cNvPr id="133" name="TextBox 132"/>
+          <p:cNvSpPr txBox="1"/>
+          <p:nvPr/>
+        </p:nvSpPr>
+        <p:spPr>
+          <a:xfrm>
+            <a:off x="457200" y="1572768"/>
+            <a:ext cx="8229600" cy="3200400"/>
+          </a:xfrm>
+          <a:prstGeom prst="rect">
+            <a:avLst/>
+          </a:prstGeom>
+          <a:noFill/>
+        </p:spPr>
+        <p:txBody>
+          <a:bodyPr wrap="square" lIns="45720" tIns="27432">
+            <a:spAutoFit/>
+          </a:bodyPr>
+          <a:lstStyle/>
+          <a:p>
+            <a:pPr algn="l">
+              <a:spcAft>
+                <a:spcPts val="600"/>
+              </a:spcAft>
+            </a:pPr>
+            <a:r>
+              <a:rPr sz="1250" b="0">
+                <a:solidFill>
+                  <a:srgbClr val="262F40"/>
+                </a:solidFill>
+                <a:latin typeface="Calibri"/>
+              </a:rPr>
+              <a:t>•  Connect real CCTNS / KSP data via Catalyst Data Store (replacing synthetic data).</a:t>
+            </a:r>
+          </a:p>
+          <a:p>
+            <a:pPr algn="l">
+              <a:spcAft>
+                <a:spcPts val="600"/>
+              </a:spcAft>
+            </a:pPr>
+            <a:r>
+              <a:rPr sz="1250" b="0">
+                <a:solidFill>
+                  <a:srgbClr val="262F40"/>
+                </a:solidFill>
+                <a:latin typeface="Calibri"/>
+              </a:rPr>
+              <a:t>•  QuickML LLM+RAG for full free-form &amp; Kannada query understanding; Zia AutoML models with validation metrics.</a:t>
+            </a:r>
+          </a:p>
+          <a:p>
+            <a:pPr algn="l">
+              <a:spcAft>
+                <a:spcPts val="600"/>
+              </a:spcAft>
+            </a:pPr>
+            <a:r>
+              <a:rPr sz="1250" b="0">
+                <a:solidFill>
+                  <a:srgbClr val="262F40"/>
+                </a:solidFill>
+                <a:latin typeface="Calibri"/>
+              </a:rPr>
+              <a:t>•  Seasonal &amp; event-based trend analysis + Cron early-warning alerts (gang / organised crime).</a:t>
+            </a:r>
+          </a:p>
+          <a:p>
+            <a:pPr algn="l">
+              <a:spcAft>
+                <a:spcPts val="600"/>
+              </a:spcAft>
+            </a:pPr>
+            <a:r>
+              <a:rPr sz="1250" b="0">
+                <a:solidFill>
+                  <a:srgbClr val="262F40"/>
+                </a:solidFill>
+                <a:latin typeface="Calibri"/>
+              </a:rPr>
+              <a:t>•  CCTV / ANPR / face integration, predictive patrolling, multi-state — “CrimeOS”.</a:t>
+            </a:r>
+          </a:p>
+          <a:p>
+            <a:pPr algn="l">
+              <a:spcAft>
+                <a:spcPts val="600"/>
+              </a:spcAft>
+            </a:pPr>
+            <a:r>
+              <a:rPr sz="1250" b="0">
+                <a:solidFill>
+                  <a:srgbClr val="262F40"/>
+                </a:solidFill>
+                <a:latin typeface="Calibri"/>
+              </a:rPr>
+              <a:t>•  Field-officer mobile app and deeper financial-intelligence workflows.</a:t>
+            </a:r>
+          </a:p>
+        </p:txBody>
+      </p:sp>
     </p:spTree>
   </p:cSld>
   <p:clrMapOvr>
@@ -7887,6 +8225,157 @@
           </a:p>
         </p:txBody>
       </p:sp>
+      <p:sp>
+        <p:nvSpPr>
+          <p:cNvPr id="61" name="TextBox 60"/>
+          <p:cNvSpPr txBox="1"/>
+          <p:nvPr/>
+        </p:nvSpPr>
+        <p:spPr>
+          <a:xfrm>
+            <a:off x="457200" y="1572768"/>
+            <a:ext cx="8229600" cy="3200400"/>
+          </a:xfrm>
+          <a:prstGeom prst="rect">
+            <a:avLst/>
+          </a:prstGeom>
+          <a:noFill/>
+        </p:spPr>
+        <p:txBody>
+          <a:bodyPr wrap="square" lIns="45720" tIns="27432">
+            <a:spAutoFit/>
+          </a:bodyPr>
+          <a:lstStyle/>
+          <a:p>
+            <a:pPr algn="l">
+              <a:spcAft>
+                <a:spcPts val="700"/>
+              </a:spcAft>
+            </a:pPr>
+            <a:r>
+              <a:rPr sz="1300" b="0">
+                <a:solidFill>
+                  <a:srgbClr val="262F40"/>
+                </a:solidFill>
+                <a:latin typeface="Calibri"/>
+              </a:rPr>
+              <a:t>An agentic Investigation Copilot for the Karnataka State Police. One natural-language question — by text or voice, in English or ಕನ್ನಡ — runs a complete investigation:</a:t>
+            </a:r>
+          </a:p>
+          <a:p>
+            <a:pPr algn="l">
+              <a:spcAft>
+                <a:spcPts val="400"/>
+              </a:spcAft>
+            </a:pPr>
+            <a:r>
+              <a:rPr sz="1250" b="0">
+                <a:solidFill>
+                  <a:srgbClr val="262F40"/>
+                </a:solidFill>
+                <a:latin typeface="Calibri"/>
+              </a:rPr>
+              <a:t>•  Conversational case retrieval (FIRs, accused, victims, locations, status, history)</a:t>
+            </a:r>
+          </a:p>
+          <a:p>
+            <a:pPr algn="l">
+              <a:spcAft>
+                <a:spcPts val="400"/>
+              </a:spcAft>
+            </a:pPr>
+            <a:r>
+              <a:rPr sz="1250" b="0">
+                <a:solidFill>
+                  <a:srgbClr val="262F40"/>
+                </a:solidFill>
+                <a:latin typeface="Calibri"/>
+              </a:rPr>
+              <a:t>•  Criminal-network graph + financial money-trail with mule-account detection</a:t>
+            </a:r>
+          </a:p>
+          <a:p>
+            <a:pPr algn="l">
+              <a:spcAft>
+                <a:spcPts val="400"/>
+              </a:spcAft>
+            </a:pPr>
+            <a:r>
+              <a:rPr sz="1250" b="0">
+                <a:solidFill>
+                  <a:srgbClr val="262F40"/>
+                </a:solidFill>
+                <a:latin typeface="Calibri"/>
+              </a:rPr>
+              <a:t>•  Crime hotspot map + recency-weighted next-hotspot forecast</a:t>
+            </a:r>
+          </a:p>
+          <a:p>
+            <a:pPr algn="l">
+              <a:spcAft>
+                <a:spcPts val="400"/>
+              </a:spcAft>
+            </a:pPr>
+            <a:r>
+              <a:rPr sz="1250" b="0">
+                <a:solidFill>
+                  <a:srgbClr val="262F40"/>
+                </a:solidFill>
+                <a:latin typeface="Calibri"/>
+              </a:rPr>
+              <a:t>•  Explainable risk scoring &amp; offender profiling — with the reasons shown</a:t>
+            </a:r>
+          </a:p>
+          <a:p>
+            <a:pPr algn="l">
+              <a:spcAft>
+                <a:spcPts val="400"/>
+              </a:spcAft>
+            </a:pPr>
+            <a:r>
+              <a:rPr sz="1250" b="0">
+                <a:solidFill>
+                  <a:srgbClr val="262F40"/>
+                </a:solidFill>
+                <a:latin typeface="Calibri"/>
+              </a:rPr>
+              <a:t>•  Sociological insights, similar-case search &amp; investigator decision support</a:t>
+            </a:r>
+          </a:p>
+          <a:p>
+            <a:pPr algn="l">
+              <a:spcAft>
+                <a:spcPts val="400"/>
+              </a:spcAft>
+            </a:pPr>
+            <a:r>
+              <a:rPr sz="1250" b="0">
+                <a:solidFill>
+                  <a:srgbClr val="262F40"/>
+                </a:solidFill>
+                <a:latin typeface="Calibri"/>
+              </a:rPr>
+              <a:t>•  Auto-generated, fully cited PDF investigation report</a:t>
+            </a:r>
+          </a:p>
+          <a:p>
+            <a:pPr algn="l">
+              <a:spcAft>
+                <a:spcPts val="200"/>
+              </a:spcAft>
+            </a:pPr>
+            <a:r>
+              <a:rPr sz="1250" b="1">
+                <a:solidFill>
+                  <a:srgbClr val="1E2761"/>
+                </a:solidFill>
+                <a:latin typeface="Calibri"/>
+              </a:rPr>
+              <a:t>Every answer is grounded in records with case-ID citations — zero hallucination. A browser prototype today, packaged for Catalyst-native deployment.</a:t>
+            </a:r>
+          </a:p>
+        </p:txBody>
+      </p:sp>
     </p:spTree>
   </p:cSld>
   <p:clrMapOvr>
@@ -7949,7 +8438,7 @@
         <p:spPr>
           <a:xfrm>
             <a:off x="240800" y="710650"/>
-            <a:ext cx="8784300" cy="1419300"/>
+            <a:ext cx="8784300" cy="3840480"/>
           </a:xfrm>
           <a:prstGeom prst="rect">
             <a:avLst/>
@@ -7973,15 +8462,16 @@
                 <a:spcPts val="0"/>
               </a:spcBef>
               <a:spcAft>
-                <a:spcPts val="0"/>
-              </a:spcAft>
-              <a:buNone/>
-            </a:pPr>
-            <a:r>
-              <a:rPr b="1" lang="en-GB" sz="1600">
-                <a:solidFill>
-                  <a:srgbClr val="000000"/>
-                </a:solidFill>
+                <a:spcPts val="800"/>
+              </a:spcAft>
+              <a:buNone/>
+            </a:pPr>
+            <a:r>
+              <a:rPr sz="1700" b="1">
+                <a:solidFill>
+                  <a:srgbClr val="1E2761"/>
+                </a:solidFill>
+                <a:latin typeface="Calibri"/>
               </a:rPr>
               <a:t>Opportunities</a:t>
             </a:r>
@@ -7992,116 +8482,127 @@
             </a:endParaRPr>
           </a:p>
           <a:p>
-            <a:pPr indent="-330200" lvl="1" marL="914400" rtl="0" algn="l">
-              <a:lnSpc>
-                <a:spcPct val="115000"/>
-              </a:lnSpc>
-              <a:spcBef>
-                <a:spcPts val="0"/>
-              </a:spcBef>
-              <a:spcAft>
-                <a:spcPts val="0"/>
-              </a:spcAft>
-              <a:buClr>
-                <a:srgbClr val="000000"/>
-              </a:buClr>
-              <a:buSzPts val="1600"/>
-              <a:buAutoNum type="alphaLcPeriod"/>
-            </a:pPr>
-            <a:r>
-              <a:rPr b="1" lang="en-GB" sz="1600">
-                <a:solidFill>
-                  <a:srgbClr val="000000"/>
-                </a:solidFill>
-              </a:rPr>
-              <a:t>How different is it from any of the other existing ideas?</a:t>
-            </a:r>
-            <a:endParaRPr b="1" sz="1600">
-              <a:solidFill>
-                <a:srgbClr val="000000"/>
-              </a:solidFill>
-            </a:endParaRPr>
-          </a:p>
-          <a:p>
-            <a:pPr indent="-330200" lvl="1" marL="914400" rtl="0" algn="l">
-              <a:lnSpc>
-                <a:spcPct val="115000"/>
-              </a:lnSpc>
-              <a:spcBef>
-                <a:spcPts val="0"/>
-              </a:spcBef>
-              <a:spcAft>
-                <a:spcPts val="0"/>
-              </a:spcAft>
-              <a:buClr>
-                <a:srgbClr val="000000"/>
-              </a:buClr>
-              <a:buSzPts val="1600"/>
-              <a:buAutoNum type="alphaLcPeriod"/>
-            </a:pPr>
-            <a:r>
-              <a:rPr b="1" lang="en-GB" sz="1600">
-                <a:solidFill>
-                  <a:srgbClr val="000000"/>
-                </a:solidFill>
-              </a:rPr>
-              <a:t>How will it be able to solve the problem?</a:t>
-            </a:r>
-            <a:endParaRPr b="1" sz="1600">
-              <a:solidFill>
-                <a:srgbClr val="000000"/>
-              </a:solidFill>
-            </a:endParaRPr>
-          </a:p>
-          <a:p>
-            <a:pPr indent="-330200" lvl="1" marL="914400" rtl="0" algn="l">
-              <a:lnSpc>
-                <a:spcPct val="115000"/>
-              </a:lnSpc>
-              <a:spcBef>
-                <a:spcPts val="0"/>
-              </a:spcBef>
-              <a:spcAft>
-                <a:spcPts val="0"/>
-              </a:spcAft>
-              <a:buClr>
-                <a:srgbClr val="000000"/>
-              </a:buClr>
-              <a:buSzPts val="1600"/>
-              <a:buAutoNum type="alphaLcPeriod"/>
-            </a:pPr>
-            <a:r>
-              <a:rPr b="1" lang="en-GB" sz="1600">
-                <a:solidFill>
-                  <a:srgbClr val="000000"/>
-                </a:solidFill>
-              </a:rPr>
-              <a:t>USP of the proposed solution</a:t>
-            </a:r>
-            <a:endParaRPr b="1" sz="1600">
-              <a:solidFill>
-                <a:srgbClr val="000000"/>
-              </a:solidFill>
-            </a:endParaRPr>
-          </a:p>
-          <a:p>
-            <a:pPr indent="0" lvl="0" marL="0" rtl="0" algn="l">
-              <a:spcBef>
-                <a:spcPts val="0"/>
-              </a:spcBef>
-              <a:spcAft>
-                <a:spcPts val="0"/>
-              </a:spcAft>
-              <a:buNone/>
-            </a:pPr>
-            <a:r>
+            <a:pPr>
+              <a:spcAft>
+                <a:spcPts val="500"/>
+              </a:spcAft>
+            </a:pPr>
+            <a:r>
+              <a:rPr sz="1250" b="1">
+                <a:solidFill>
+                  <a:srgbClr val="2F6FE0"/>
+                </a:solidFill>
+                <a:latin typeface="Calibri"/>
+              </a:rPr>
+              <a:t>How different from existing ideas?  </a:t>
+            </a:r>
+            <a:r>
+              <a:rPr sz="1250">
+                <a:solidFill>
+                  <a:srgbClr val="262F40"/>
+                </a:solidFill>
+                <a:latin typeface="Calibri"/>
+              </a:rPr>
               <a:t/>
             </a:r>
-            <a:endParaRPr b="1" sz="1600">
-              <a:solidFill>
-                <a:srgbClr val="595959"/>
-              </a:solidFill>
-            </a:endParaRPr>
+          </a:p>
+          <a:p>
+            <a:pPr algn="l">
+              <a:spcAft>
+                <a:spcPts val="700"/>
+              </a:spcAft>
+            </a:pPr>
+            <a:r>
+              <a:rPr sz="1200" b="0">
+                <a:solidFill>
+                  <a:srgbClr val="262F40"/>
+                </a:solidFill>
+                <a:latin typeface="Calibri"/>
+              </a:rPr>
+              <a:t>Not a chatbot or static dashboard — an autonomous agent that fuses conversation + graph + geospatial + financial + sociological analysis, and cites every fact (most LLM tools hallucinate).</a:t>
+            </a:r>
+          </a:p>
+          <a:p>
+            <a:pPr>
+              <a:spcAft>
+                <a:spcPts val="500"/>
+              </a:spcAft>
+            </a:pPr>
+            <a:r>
+              <a:rPr sz="1250" b="1">
+                <a:solidFill>
+                  <a:srgbClr val="2F6FE0"/>
+                </a:solidFill>
+                <a:latin typeface="Calibri"/>
+              </a:rPr>
+              <a:t>How will it solve the problem?  </a:t>
+            </a:r>
+            <a:r>
+              <a:rPr sz="1250">
+                <a:solidFill>
+                  <a:srgbClr val="262F40"/>
+                </a:solidFill>
+                <a:latin typeface="Calibri"/>
+              </a:rPr>
+              <a:t/>
+            </a:r>
+          </a:p>
+          <a:p>
+            <a:pPr algn="l">
+              <a:spcAft>
+                <a:spcPts val="700"/>
+              </a:spcAft>
+            </a:pPr>
+            <a:r>
+              <a:rPr sz="1200" b="0">
+                <a:solidFill>
+                  <a:srgbClr val="262F40"/>
+                </a:solidFill>
+                <a:latin typeface="Calibri"/>
+              </a:rPr>
+              <a:t>Collapses hours of manual case-stitching (search → link → map → report) into one query for investigators, analysts and policymakers.</a:t>
+            </a:r>
+          </a:p>
+          <a:p>
+            <a:pPr>
+              <a:spcAft>
+                <a:spcPts val="500"/>
+              </a:spcAft>
+            </a:pPr>
+            <a:r>
+              <a:rPr sz="1250" b="1">
+                <a:solidFill>
+                  <a:srgbClr val="2F6FE0"/>
+                </a:solidFill>
+                <a:latin typeface="Calibri"/>
+              </a:rPr>
+              <a:t>USP of the proposed solution  </a:t>
+            </a:r>
+            <a:r>
+              <a:rPr sz="1250">
+                <a:solidFill>
+                  <a:srgbClr val="262F40"/>
+                </a:solidFill>
+                <a:latin typeface="Calibri"/>
+              </a:rPr>
+              <a:t/>
+            </a:r>
+          </a:p>
+          <a:p>
+            <a:pPr algn="l">
+              <a:spcAft>
+                <a:spcPts val="200"/>
+              </a:spcAft>
+            </a:pPr>
+            <a:r>
+              <a:rPr sz="1200" b="0">
+                <a:solidFill>
+                  <a:srgbClr val="262F40"/>
+                </a:solidFill>
+                <a:latin typeface="Calibri"/>
+              </a:rPr>
+              <a:t>Zero-hallucination grounded answers · one-question autonomous investigation · explainable AI · bilingual + voice · Catalyst-native + role-governed.</a:t>
+            </a:r>
           </a:p>
         </p:txBody>
       </p:sp>
@@ -8200,6 +8701,189 @@
           </a:p>
         </p:txBody>
       </p:sp>
+      <p:sp>
+        <p:nvSpPr>
+          <p:cNvPr id="73" name="TextBox 72"/>
+          <p:cNvSpPr txBox="1"/>
+          <p:nvPr/>
+        </p:nvSpPr>
+        <p:spPr>
+          <a:xfrm>
+            <a:off x="457200" y="1572768"/>
+            <a:ext cx="8229600" cy="3246120"/>
+          </a:xfrm>
+          <a:prstGeom prst="rect">
+            <a:avLst/>
+          </a:prstGeom>
+          <a:noFill/>
+        </p:spPr>
+        <p:txBody>
+          <a:bodyPr wrap="square" lIns="45720" tIns="27432">
+            <a:spAutoFit/>
+          </a:bodyPr>
+          <a:lstStyle/>
+          <a:p>
+            <a:pPr algn="l">
+              <a:spcAft>
+                <a:spcPts val="400"/>
+              </a:spcAft>
+            </a:pPr>
+            <a:r>
+              <a:rPr sz="1250" b="0">
+                <a:solidFill>
+                  <a:srgbClr val="262F40"/>
+                </a:solidFill>
+                <a:latin typeface="Calibri"/>
+              </a:rPr>
+              <a:t>•  🤖 Conversational copilot — NL + voice, English/ಕನ್ನಡ, context-aware follow-ups</a:t>
+            </a:r>
+          </a:p>
+          <a:p>
+            <a:pPr algn="l">
+              <a:spcAft>
+                <a:spcPts val="400"/>
+              </a:spcAft>
+            </a:pPr>
+            <a:r>
+              <a:rPr sz="1250" b="0">
+                <a:solidFill>
+                  <a:srgbClr val="262F40"/>
+                </a:solidFill>
+                <a:latin typeface="Calibri"/>
+              </a:rPr>
+              <a:t>•  ✅ Grounded answers with case-ID citations (zero hallucination)</a:t>
+            </a:r>
+          </a:p>
+          <a:p>
+            <a:pPr algn="l">
+              <a:spcAft>
+                <a:spcPts val="400"/>
+              </a:spcAft>
+            </a:pPr>
+            <a:r>
+              <a:rPr sz="1250" b="0">
+                <a:solidFill>
+                  <a:srgbClr val="262F40"/>
+                </a:solidFill>
+                <a:latin typeface="Calibri"/>
+              </a:rPr>
+              <a:t>•  ⭐ Autonomous Investigation — one query runs the whole pipeline</a:t>
+            </a:r>
+          </a:p>
+          <a:p>
+            <a:pPr algn="l">
+              <a:spcAft>
+                <a:spcPts val="400"/>
+              </a:spcAft>
+            </a:pPr>
+            <a:r>
+              <a:rPr sz="1250" b="0">
+                <a:solidFill>
+                  <a:srgbClr val="262F40"/>
+                </a:solidFill>
+                <a:latin typeface="Calibri"/>
+              </a:rPr>
+              <a:t>•  🗺️ Crime hotspot map (heatmap + area-label markers + predicted hotspot)</a:t>
+            </a:r>
+          </a:p>
+          <a:p>
+            <a:pPr algn="l">
+              <a:spcAft>
+                <a:spcPts val="400"/>
+              </a:spcAft>
+            </a:pPr>
+            <a:r>
+              <a:rPr sz="1250" b="0">
+                <a:solidFill>
+                  <a:srgbClr val="262F40"/>
+                </a:solidFill>
+                <a:latin typeface="Calibri"/>
+              </a:rPr>
+              <a:t>•  🕸️ Criminal network graph (associates · phones · vehicles · cases)</a:t>
+            </a:r>
+          </a:p>
+          <a:p>
+            <a:pPr algn="l">
+              <a:spcAft>
+                <a:spcPts val="400"/>
+              </a:spcAft>
+            </a:pPr>
+            <a:r>
+              <a:rPr sz="1250" b="0">
+                <a:solidFill>
+                  <a:srgbClr val="262F40"/>
+                </a:solidFill>
+                <a:latin typeface="Calibri"/>
+              </a:rPr>
+              <a:t>•  💸 Financial money-trail with mule-account detection</a:t>
+            </a:r>
+          </a:p>
+          <a:p>
+            <a:pPr algn="l">
+              <a:spcAft>
+                <a:spcPts val="400"/>
+              </a:spcAft>
+            </a:pPr>
+            <a:r>
+              <a:rPr sz="1250" b="0">
+                <a:solidFill>
+                  <a:srgbClr val="262F40"/>
+                </a:solidFill>
+                <a:latin typeface="Calibri"/>
+              </a:rPr>
+              <a:t>•  🏙️ Sociological insights (socio-economic correlation + demographics)</a:t>
+            </a:r>
+          </a:p>
+          <a:p>
+            <a:pPr algn="l">
+              <a:spcAft>
+                <a:spcPts val="400"/>
+              </a:spcAft>
+            </a:pPr>
+            <a:r>
+              <a:rPr sz="1250" b="0">
+                <a:solidFill>
+                  <a:srgbClr val="262F40"/>
+                </a:solidFill>
+                <a:latin typeface="Calibri"/>
+              </a:rPr>
+              <a:t>•  🔮 Explainable forecast &amp; risk · 🔎 similar-case search · 📈 timeline</a:t>
+            </a:r>
+          </a:p>
+          <a:p>
+            <a:pPr algn="l">
+              <a:spcAft>
+                <a:spcPts val="400"/>
+              </a:spcAft>
+            </a:pPr>
+            <a:r>
+              <a:rPr sz="1250" b="0">
+                <a:solidFill>
+                  <a:srgbClr val="262F40"/>
+                </a:solidFill>
+                <a:latin typeface="Calibri"/>
+              </a:rPr>
+              <a:t>•  📄 One-click cited PDF investigation report</a:t>
+            </a:r>
+          </a:p>
+          <a:p>
+            <a:pPr algn="l">
+              <a:spcAft>
+                <a:spcPts val="400"/>
+              </a:spcAft>
+            </a:pPr>
+            <a:r>
+              <a:rPr sz="1250" b="0">
+                <a:solidFill>
+                  <a:srgbClr val="262F40"/>
+                </a:solidFill>
+                <a:latin typeface="Calibri"/>
+              </a:rPr>
+              <a:t>•  🔐 Role-based access + PII masking + audit log · 🌓 light/dark + voice</a:t>
+            </a:r>
+          </a:p>
+        </p:txBody>
+      </p:sp>
     </p:spTree>
   </p:cSld>
   <p:clrMapOvr>
@@ -8292,6 +8976,586 @@
               <a:t>Process flow diagram or Use-case diagram</a:t>
             </a:r>
             <a:endParaRPr b="1" sz="1800"/>
+          </a:p>
+        </p:txBody>
+      </p:sp>
+      <p:sp>
+        <p:nvSpPr>
+          <p:cNvPr id="79" name="Rounded Rectangle 78"/>
+          <p:cNvSpPr/>
+          <p:nvPr/>
+        </p:nvSpPr>
+        <p:spPr>
+          <a:xfrm>
+            <a:off x="457200" y="2331720"/>
+            <a:ext cx="1417320" cy="960120"/>
+          </a:xfrm>
+          <a:prstGeom prst="roundRect">
+            <a:avLst/>
+          </a:prstGeom>
+          <a:solidFill>
+            <a:srgbClr val="2F6FE0"/>
+          </a:solidFill>
+          <a:ln>
+            <a:noFill/>
+          </a:ln>
+          <a:effectLst/>
+        </p:spPr>
+        <p:style>
+          <a:lnRef idx="1">
+            <a:schemeClr val="accent1"/>
+          </a:lnRef>
+          <a:fillRef idx="3">
+            <a:schemeClr val="accent1"/>
+          </a:fillRef>
+          <a:effectRef idx="2">
+            <a:schemeClr val="accent1"/>
+          </a:effectRef>
+          <a:fontRef idx="minor">
+            <a:schemeClr val="lt1"/>
+          </a:fontRef>
+        </p:style>
+        <p:txBody>
+          <a:bodyPr rtlCol="0" anchor="ctr" wrap="square" lIns="54864" rIns="54864" tIns="18288" bIns="18288"/>
+          <a:lstStyle/>
+          <a:p>
+            <a:pPr algn="ctr"/>
+            <a:r>
+              <a:rPr sz="1150" b="1">
+                <a:solidFill>
+                  <a:srgbClr val="FFFFFF"/>
+                </a:solidFill>
+                <a:latin typeface="Calibri"/>
+              </a:rPr>
+              <a:t>1</a:t>
+            </a:r>
+          </a:p>
+          <a:p>
+            <a:pPr algn="ctr"/>
+            <a:r>
+              <a:rPr sz="1150" b="1">
+                <a:solidFill>
+                  <a:srgbClr val="FFFFFF"/>
+                </a:solidFill>
+                <a:latin typeface="Calibri"/>
+              </a:rPr>
+              <a:t>Ask</a:t>
+            </a:r>
+          </a:p>
+          <a:p>
+            <a:pPr algn="ctr"/>
+            <a:r>
+              <a:rPr sz="1150" b="1">
+                <a:solidFill>
+                  <a:srgbClr val="FFFFFF"/>
+                </a:solidFill>
+                <a:latin typeface="Calibri"/>
+              </a:rPr>
+              <a:t>(text / voice)</a:t>
+            </a:r>
+          </a:p>
+        </p:txBody>
+      </p:sp>
+      <p:sp>
+        <p:nvSpPr>
+          <p:cNvPr id="80" name="TextBox 79"/>
+          <p:cNvSpPr txBox="1"/>
+          <p:nvPr/>
+        </p:nvSpPr>
+        <p:spPr>
+          <a:xfrm>
+            <a:off x="1834514" y="2628899"/>
+            <a:ext cx="365760" cy="292608"/>
+          </a:xfrm>
+          <a:prstGeom prst="rect">
+            <a:avLst/>
+          </a:prstGeom>
+          <a:noFill/>
+        </p:spPr>
+        <p:txBody>
+          <a:bodyPr wrap="square" lIns="45720" tIns="27432">
+            <a:spAutoFit/>
+          </a:bodyPr>
+          <a:lstStyle/>
+          <a:p>
+            <a:pPr algn="ctr">
+              <a:spcAft>
+                <a:spcPts val="500"/>
+              </a:spcAft>
+            </a:pPr>
+            <a:r>
+              <a:rPr sz="1600" b="1">
+                <a:solidFill>
+                  <a:srgbClr val="55637A"/>
+                </a:solidFill>
+                <a:latin typeface="Calibri"/>
+              </a:rPr>
+              <a:t>→</a:t>
+            </a:r>
+          </a:p>
+        </p:txBody>
+      </p:sp>
+      <p:sp>
+        <p:nvSpPr>
+          <p:cNvPr id="81" name="Rounded Rectangle 80"/>
+          <p:cNvSpPr/>
+          <p:nvPr/>
+        </p:nvSpPr>
+        <p:spPr>
+          <a:xfrm>
+            <a:off x="2160270" y="2331720"/>
+            <a:ext cx="1417320" cy="960120"/>
+          </a:xfrm>
+          <a:prstGeom prst="roundRect">
+            <a:avLst/>
+          </a:prstGeom>
+          <a:solidFill>
+            <a:srgbClr val="0D92A6"/>
+          </a:solidFill>
+          <a:ln>
+            <a:noFill/>
+          </a:ln>
+          <a:effectLst/>
+        </p:spPr>
+        <p:style>
+          <a:lnRef idx="1">
+            <a:schemeClr val="accent1"/>
+          </a:lnRef>
+          <a:fillRef idx="3">
+            <a:schemeClr val="accent1"/>
+          </a:fillRef>
+          <a:effectRef idx="2">
+            <a:schemeClr val="accent1"/>
+          </a:effectRef>
+          <a:fontRef idx="minor">
+            <a:schemeClr val="lt1"/>
+          </a:fontRef>
+        </p:style>
+        <p:txBody>
+          <a:bodyPr rtlCol="0" anchor="ctr" wrap="square" lIns="54864" rIns="54864" tIns="18288" bIns="18288"/>
+          <a:lstStyle/>
+          <a:p>
+            <a:pPr algn="ctr"/>
+            <a:r>
+              <a:rPr sz="1150" b="1">
+                <a:solidFill>
+                  <a:srgbClr val="FFFFFF"/>
+                </a:solidFill>
+                <a:latin typeface="Calibri"/>
+              </a:rPr>
+              <a:t>2</a:t>
+            </a:r>
+          </a:p>
+          <a:p>
+            <a:pPr algn="ctr"/>
+            <a:r>
+              <a:rPr sz="1150" b="1">
+                <a:solidFill>
+                  <a:srgbClr val="FFFFFF"/>
+                </a:solidFill>
+                <a:latin typeface="Calibri"/>
+              </a:rPr>
+              <a:t>Parse</a:t>
+            </a:r>
+          </a:p>
+          <a:p>
+            <a:pPr algn="ctr"/>
+            <a:r>
+              <a:rPr sz="1150" b="1">
+                <a:solidFill>
+                  <a:srgbClr val="FFFFFF"/>
+                </a:solidFill>
+                <a:latin typeface="Calibri"/>
+              </a:rPr>
+              <a:t>intent</a:t>
+            </a:r>
+          </a:p>
+        </p:txBody>
+      </p:sp>
+      <p:sp>
+        <p:nvSpPr>
+          <p:cNvPr id="82" name="TextBox 81"/>
+          <p:cNvSpPr txBox="1"/>
+          <p:nvPr/>
+        </p:nvSpPr>
+        <p:spPr>
+          <a:xfrm>
+            <a:off x="3537584" y="2628899"/>
+            <a:ext cx="365760" cy="292608"/>
+          </a:xfrm>
+          <a:prstGeom prst="rect">
+            <a:avLst/>
+          </a:prstGeom>
+          <a:noFill/>
+        </p:spPr>
+        <p:txBody>
+          <a:bodyPr wrap="square" lIns="45720" tIns="27432">
+            <a:spAutoFit/>
+          </a:bodyPr>
+          <a:lstStyle/>
+          <a:p>
+            <a:pPr algn="ctr">
+              <a:spcAft>
+                <a:spcPts val="500"/>
+              </a:spcAft>
+            </a:pPr>
+            <a:r>
+              <a:rPr sz="1600" b="1">
+                <a:solidFill>
+                  <a:srgbClr val="55637A"/>
+                </a:solidFill>
+                <a:latin typeface="Calibri"/>
+              </a:rPr>
+              <a:t>→</a:t>
+            </a:r>
+          </a:p>
+        </p:txBody>
+      </p:sp>
+      <p:sp>
+        <p:nvSpPr>
+          <p:cNvPr id="83" name="Rounded Rectangle 82"/>
+          <p:cNvSpPr/>
+          <p:nvPr/>
+        </p:nvSpPr>
+        <p:spPr>
+          <a:xfrm>
+            <a:off x="3863339" y="2331720"/>
+            <a:ext cx="1417320" cy="960120"/>
+          </a:xfrm>
+          <a:prstGeom prst="roundRect">
+            <a:avLst/>
+          </a:prstGeom>
+          <a:solidFill>
+            <a:srgbClr val="1E2761"/>
+          </a:solidFill>
+          <a:ln>
+            <a:noFill/>
+          </a:ln>
+          <a:effectLst/>
+        </p:spPr>
+        <p:style>
+          <a:lnRef idx="1">
+            <a:schemeClr val="accent1"/>
+          </a:lnRef>
+          <a:fillRef idx="3">
+            <a:schemeClr val="accent1"/>
+          </a:fillRef>
+          <a:effectRef idx="2">
+            <a:schemeClr val="accent1"/>
+          </a:effectRef>
+          <a:fontRef idx="minor">
+            <a:schemeClr val="lt1"/>
+          </a:fontRef>
+        </p:style>
+        <p:txBody>
+          <a:bodyPr rtlCol="0" anchor="ctr" wrap="square" lIns="54864" rIns="54864" tIns="18288" bIns="18288"/>
+          <a:lstStyle/>
+          <a:p>
+            <a:pPr algn="ctr"/>
+            <a:r>
+              <a:rPr sz="1150" b="1">
+                <a:solidFill>
+                  <a:srgbClr val="FFFFFF"/>
+                </a:solidFill>
+                <a:latin typeface="Calibri"/>
+              </a:rPr>
+              <a:t>3</a:t>
+            </a:r>
+          </a:p>
+          <a:p>
+            <a:pPr algn="ctr"/>
+            <a:r>
+              <a:rPr sz="1150" b="1">
+                <a:solidFill>
+                  <a:srgbClr val="FFFFFF"/>
+                </a:solidFill>
+                <a:latin typeface="Calibri"/>
+              </a:rPr>
+              <a:t>Grounded</a:t>
+            </a:r>
+          </a:p>
+          <a:p>
+            <a:pPr algn="ctr"/>
+            <a:r>
+              <a:rPr sz="1150" b="1">
+                <a:solidFill>
+                  <a:srgbClr val="FFFFFF"/>
+                </a:solidFill>
+                <a:latin typeface="Calibri"/>
+              </a:rPr>
+              <a:t>retrieval</a:t>
+            </a:r>
+          </a:p>
+        </p:txBody>
+      </p:sp>
+      <p:sp>
+        <p:nvSpPr>
+          <p:cNvPr id="84" name="TextBox 83"/>
+          <p:cNvSpPr txBox="1"/>
+          <p:nvPr/>
+        </p:nvSpPr>
+        <p:spPr>
+          <a:xfrm>
+            <a:off x="5240654" y="2628899"/>
+            <a:ext cx="365760" cy="292608"/>
+          </a:xfrm>
+          <a:prstGeom prst="rect">
+            <a:avLst/>
+          </a:prstGeom>
+          <a:noFill/>
+        </p:spPr>
+        <p:txBody>
+          <a:bodyPr wrap="square" lIns="45720" tIns="27432">
+            <a:spAutoFit/>
+          </a:bodyPr>
+          <a:lstStyle/>
+          <a:p>
+            <a:pPr algn="ctr">
+              <a:spcAft>
+                <a:spcPts val="500"/>
+              </a:spcAft>
+            </a:pPr>
+            <a:r>
+              <a:rPr sz="1600" b="1">
+                <a:solidFill>
+                  <a:srgbClr val="55637A"/>
+                </a:solidFill>
+                <a:latin typeface="Calibri"/>
+              </a:rPr>
+              <a:t>→</a:t>
+            </a:r>
+          </a:p>
+        </p:txBody>
+      </p:sp>
+      <p:sp>
+        <p:nvSpPr>
+          <p:cNvPr id="85" name="Rounded Rectangle 84"/>
+          <p:cNvSpPr/>
+          <p:nvPr/>
+        </p:nvSpPr>
+        <p:spPr>
+          <a:xfrm>
+            <a:off x="5566410" y="2331720"/>
+            <a:ext cx="1417320" cy="960120"/>
+          </a:xfrm>
+          <a:prstGeom prst="roundRect">
+            <a:avLst/>
+          </a:prstGeom>
+          <a:solidFill>
+            <a:srgbClr val="5B3DF5"/>
+          </a:solidFill>
+          <a:ln>
+            <a:noFill/>
+          </a:ln>
+          <a:effectLst/>
+        </p:spPr>
+        <p:style>
+          <a:lnRef idx="1">
+            <a:schemeClr val="accent1"/>
+          </a:lnRef>
+          <a:fillRef idx="3">
+            <a:schemeClr val="accent1"/>
+          </a:fillRef>
+          <a:effectRef idx="2">
+            <a:schemeClr val="accent1"/>
+          </a:effectRef>
+          <a:fontRef idx="minor">
+            <a:schemeClr val="lt1"/>
+          </a:fontRef>
+        </p:style>
+        <p:txBody>
+          <a:bodyPr rtlCol="0" anchor="ctr" wrap="square" lIns="54864" rIns="54864" tIns="18288" bIns="18288"/>
+          <a:lstStyle/>
+          <a:p>
+            <a:pPr algn="ctr"/>
+            <a:r>
+              <a:rPr sz="1150" b="1">
+                <a:solidFill>
+                  <a:srgbClr val="FFFFFF"/>
+                </a:solidFill>
+                <a:latin typeface="Calibri"/>
+              </a:rPr>
+              <a:t>4</a:t>
+            </a:r>
+          </a:p>
+          <a:p>
+            <a:pPr algn="ctr"/>
+            <a:r>
+              <a:rPr sz="1150" b="1">
+                <a:solidFill>
+                  <a:srgbClr val="FFFFFF"/>
+                </a:solidFill>
+                <a:latin typeface="Calibri"/>
+              </a:rPr>
+              <a:t>Analyse</a:t>
+            </a:r>
+          </a:p>
+          <a:p>
+            <a:pPr algn="ctr"/>
+            <a:r>
+              <a:rPr sz="1150" b="1">
+                <a:solidFill>
+                  <a:srgbClr val="FFFFFF"/>
+                </a:solidFill>
+                <a:latin typeface="Calibri"/>
+              </a:rPr>
+              <a:t>graph·geo·₹·socio</a:t>
+            </a:r>
+          </a:p>
+        </p:txBody>
+      </p:sp>
+      <p:sp>
+        <p:nvSpPr>
+          <p:cNvPr id="86" name="TextBox 85"/>
+          <p:cNvSpPr txBox="1"/>
+          <p:nvPr/>
+        </p:nvSpPr>
+        <p:spPr>
+          <a:xfrm>
+            <a:off x="6943725" y="2628899"/>
+            <a:ext cx="365760" cy="292608"/>
+          </a:xfrm>
+          <a:prstGeom prst="rect">
+            <a:avLst/>
+          </a:prstGeom>
+          <a:noFill/>
+        </p:spPr>
+        <p:txBody>
+          <a:bodyPr wrap="square" lIns="45720" tIns="27432">
+            <a:spAutoFit/>
+          </a:bodyPr>
+          <a:lstStyle/>
+          <a:p>
+            <a:pPr algn="ctr">
+              <a:spcAft>
+                <a:spcPts val="500"/>
+              </a:spcAft>
+            </a:pPr>
+            <a:r>
+              <a:rPr sz="1600" b="1">
+                <a:solidFill>
+                  <a:srgbClr val="55637A"/>
+                </a:solidFill>
+                <a:latin typeface="Calibri"/>
+              </a:rPr>
+              <a:t>→</a:t>
+            </a:r>
+          </a:p>
+        </p:txBody>
+      </p:sp>
+      <p:sp>
+        <p:nvSpPr>
+          <p:cNvPr id="87" name="Rounded Rectangle 86"/>
+          <p:cNvSpPr/>
+          <p:nvPr/>
+        </p:nvSpPr>
+        <p:spPr>
+          <a:xfrm>
+            <a:off x="7269480" y="2331720"/>
+            <a:ext cx="1417320" cy="960120"/>
+          </a:xfrm>
+          <a:prstGeom prst="roundRect">
+            <a:avLst/>
+          </a:prstGeom>
+          <a:solidFill>
+            <a:srgbClr val="1F7D47"/>
+          </a:solidFill>
+          <a:ln>
+            <a:noFill/>
+          </a:ln>
+          <a:effectLst/>
+        </p:spPr>
+        <p:style>
+          <a:lnRef idx="1">
+            <a:schemeClr val="accent1"/>
+          </a:lnRef>
+          <a:fillRef idx="3">
+            <a:schemeClr val="accent1"/>
+          </a:fillRef>
+          <a:effectRef idx="2">
+            <a:schemeClr val="accent1"/>
+          </a:effectRef>
+          <a:fontRef idx="minor">
+            <a:schemeClr val="lt1"/>
+          </a:fontRef>
+        </p:style>
+        <p:txBody>
+          <a:bodyPr rtlCol="0" anchor="ctr" wrap="square" lIns="54864" rIns="54864" tIns="18288" bIns="18288"/>
+          <a:lstStyle/>
+          <a:p>
+            <a:pPr algn="ctr"/>
+            <a:r>
+              <a:rPr sz="1150" b="1">
+                <a:solidFill>
+                  <a:srgbClr val="FFFFFF"/>
+                </a:solidFill>
+                <a:latin typeface="Calibri"/>
+              </a:rPr>
+              <a:t>5</a:t>
+            </a:r>
+          </a:p>
+          <a:p>
+            <a:pPr algn="ctr"/>
+            <a:r>
+              <a:rPr sz="1150" b="1">
+                <a:solidFill>
+                  <a:srgbClr val="FFFFFF"/>
+                </a:solidFill>
+                <a:latin typeface="Calibri"/>
+              </a:rPr>
+              <a:t>Explain</a:t>
+            </a:r>
+          </a:p>
+          <a:p>
+            <a:pPr algn="ctr"/>
+            <a:r>
+              <a:rPr sz="1150" b="1">
+                <a:solidFill>
+                  <a:srgbClr val="FFFFFF"/>
+                </a:solidFill>
+                <a:latin typeface="Calibri"/>
+              </a:rPr>
+              <a:t>+ cited PDF</a:t>
+            </a:r>
+          </a:p>
+        </p:txBody>
+      </p:sp>
+      <p:sp>
+        <p:nvSpPr>
+          <p:cNvPr id="88" name="TextBox 87"/>
+          <p:cNvSpPr txBox="1"/>
+          <p:nvPr/>
+        </p:nvSpPr>
+        <p:spPr>
+          <a:xfrm>
+            <a:off x="457200" y="3520439"/>
+            <a:ext cx="8229600" cy="822960"/>
+          </a:xfrm>
+          <a:prstGeom prst="rect">
+            <a:avLst/>
+          </a:prstGeom>
+          <a:noFill/>
+        </p:spPr>
+        <p:txBody>
+          <a:bodyPr wrap="square" lIns="45720" tIns="27432">
+            <a:spAutoFit/>
+          </a:bodyPr>
+          <a:lstStyle/>
+          <a:p>
+            <a:pPr algn="l">
+              <a:spcAft>
+                <a:spcPts val="500"/>
+              </a:spcAft>
+            </a:pPr>
+            <a:r>
+              <a:rPr sz="1200" b="0">
+                <a:solidFill>
+                  <a:srgbClr val="55637A"/>
+                </a:solidFill>
+                <a:latin typeface="Calibri"/>
+              </a:rPr>
+              <a:t>One question triggers the full pipeline autonomously. The grounded-retrieval step cites the exact case IDs used, so every downstream panel and the report are verifiable end-to-end.</a:t>
+            </a:r>
           </a:p>
         </p:txBody>
       </p:sp>
@@ -8390,6 +9654,69 @@
           </a:p>
         </p:txBody>
       </p:sp>
+      <p:pic>
+        <p:nvPicPr>
+          <p:cNvPr id="85" name="Picture 84" descr="01-overview-dark.png"/>
+          <p:cNvPicPr>
+            <a:picLocks noChangeAspect="1"/>
+          </p:cNvPicPr>
+          <p:nvPr/>
+        </p:nvPicPr>
+        <p:blipFill>
+          <a:blip r:embed="rId4"/>
+          <a:stretch>
+            <a:fillRect/>
+          </a:stretch>
+        </p:blipFill>
+        <p:spPr>
+          <a:xfrm>
+            <a:off x="2340864" y="1572768"/>
+            <a:ext cx="4462272" cy="2788920"/>
+          </a:xfrm>
+          <a:prstGeom prst="rect">
+            <a:avLst/>
+          </a:prstGeom>
+        </p:spPr>
+      </p:pic>
+      <p:sp>
+        <p:nvSpPr>
+          <p:cNvPr id="86" name="TextBox 85"/>
+          <p:cNvSpPr txBox="1"/>
+          <p:nvPr/>
+        </p:nvSpPr>
+        <p:spPr>
+          <a:xfrm>
+            <a:off x="457200" y="4434840"/>
+            <a:ext cx="8229600" cy="457200"/>
+          </a:xfrm>
+          <a:prstGeom prst="rect">
+            <a:avLst/>
+          </a:prstGeom>
+          <a:noFill/>
+        </p:spPr>
+        <p:txBody>
+          <a:bodyPr wrap="square" lIns="45720" tIns="27432">
+            <a:spAutoFit/>
+          </a:bodyPr>
+          <a:lstStyle/>
+          <a:p>
+            <a:pPr algn="ctr">
+              <a:spcAft>
+                <a:spcPts val="500"/>
+              </a:spcAft>
+            </a:pPr>
+            <a:r>
+              <a:rPr sz="1150" b="0">
+                <a:solidFill>
+                  <a:srgbClr val="55637A"/>
+                </a:solidFill>
+                <a:latin typeface="Calibri"/>
+              </a:rPr>
+              <a:t>Live single-screen command centre — the actual prototype UI (not a mock-up).</a:t>
+            </a:r>
+          </a:p>
+        </p:txBody>
+      </p:sp>
     </p:spTree>
   </p:cSld>
   <p:clrMapOvr>
@@ -8482,6 +9809,335 @@
               <a:t>Architecture diagram of the proposed solution</a:t>
             </a:r>
             <a:endParaRPr b="1" sz="1800"/>
+          </a:p>
+        </p:txBody>
+      </p:sp>
+      <p:sp>
+        <p:nvSpPr>
+          <p:cNvPr id="91" name="Rounded Rectangle 90"/>
+          <p:cNvSpPr/>
+          <p:nvPr/>
+        </p:nvSpPr>
+        <p:spPr>
+          <a:xfrm>
+            <a:off x="548640" y="1627632"/>
+            <a:ext cx="8046720" cy="603504"/>
+          </a:xfrm>
+          <a:prstGeom prst="roundRect">
+            <a:avLst/>
+          </a:prstGeom>
+          <a:solidFill>
+            <a:srgbClr val="1E2761"/>
+          </a:solidFill>
+          <a:ln>
+            <a:noFill/>
+          </a:ln>
+          <a:effectLst/>
+        </p:spPr>
+        <p:style>
+          <a:lnRef idx="1">
+            <a:schemeClr val="accent1"/>
+          </a:lnRef>
+          <a:fillRef idx="3">
+            <a:schemeClr val="accent1"/>
+          </a:fillRef>
+          <a:effectRef idx="2">
+            <a:schemeClr val="accent1"/>
+          </a:effectRef>
+          <a:fontRef idx="minor">
+            <a:schemeClr val="lt1"/>
+          </a:fontRef>
+        </p:style>
+        <p:txBody>
+          <a:bodyPr rtlCol="0" anchor="ctr" wrap="square" lIns="54864" rIns="54864" tIns="18288" bIns="18288"/>
+          <a:lstStyle/>
+          <a:p>
+            <a:pPr algn="ctr"/>
+            <a:r>
+              <a:rPr sz="1150" b="1">
+                <a:solidFill>
+                  <a:srgbClr val="FFFFFF"/>
+                </a:solidFill>
+                <a:latin typeface="Calibri"/>
+              </a:rPr>
+              <a:t>Officer  ·  text / voice  ·  English + ಕನ್ನಡ</a:t>
+            </a:r>
+          </a:p>
+        </p:txBody>
+      </p:sp>
+      <p:sp>
+        <p:nvSpPr>
+          <p:cNvPr id="92" name="TextBox 91"/>
+          <p:cNvSpPr txBox="1"/>
+          <p:nvPr/>
+        </p:nvSpPr>
+        <p:spPr>
+          <a:xfrm>
+            <a:off x="4389120" y="2194560"/>
+            <a:ext cx="365760" cy="292608"/>
+          </a:xfrm>
+          <a:prstGeom prst="rect">
+            <a:avLst/>
+          </a:prstGeom>
+          <a:noFill/>
+        </p:spPr>
+        <p:txBody>
+          <a:bodyPr wrap="square" lIns="45720" tIns="27432">
+            <a:spAutoFit/>
+          </a:bodyPr>
+          <a:lstStyle/>
+          <a:p>
+            <a:pPr algn="ctr">
+              <a:spcAft>
+                <a:spcPts val="500"/>
+              </a:spcAft>
+            </a:pPr>
+            <a:r>
+              <a:rPr sz="1600" b="1">
+                <a:solidFill>
+                  <a:srgbClr val="55637A"/>
+                </a:solidFill>
+                <a:latin typeface="Calibri"/>
+              </a:rPr>
+              <a:t>↓</a:t>
+            </a:r>
+          </a:p>
+        </p:txBody>
+      </p:sp>
+      <p:sp>
+        <p:nvSpPr>
+          <p:cNvPr id="93" name="Rounded Rectangle 92"/>
+          <p:cNvSpPr/>
+          <p:nvPr/>
+        </p:nvSpPr>
+        <p:spPr>
+          <a:xfrm>
+            <a:off x="548640" y="2468880"/>
+            <a:ext cx="8046720" cy="603504"/>
+          </a:xfrm>
+          <a:prstGeom prst="roundRect">
+            <a:avLst/>
+          </a:prstGeom>
+          <a:solidFill>
+            <a:srgbClr val="2F6FE0"/>
+          </a:solidFill>
+          <a:ln>
+            <a:noFill/>
+          </a:ln>
+          <a:effectLst/>
+        </p:spPr>
+        <p:style>
+          <a:lnRef idx="1">
+            <a:schemeClr val="accent1"/>
+          </a:lnRef>
+          <a:fillRef idx="3">
+            <a:schemeClr val="accent1"/>
+          </a:fillRef>
+          <a:effectRef idx="2">
+            <a:schemeClr val="accent1"/>
+          </a:effectRef>
+          <a:fontRef idx="minor">
+            <a:schemeClr val="lt1"/>
+          </a:fontRef>
+        </p:style>
+        <p:txBody>
+          <a:bodyPr rtlCol="0" anchor="ctr" wrap="square" lIns="54864" rIns="54864" tIns="18288" bIns="18288"/>
+          <a:lstStyle/>
+          <a:p>
+            <a:pPr algn="ctr"/>
+            <a:r>
+              <a:rPr sz="1150" b="1">
+                <a:solidFill>
+                  <a:srgbClr val="FFFFFF"/>
+                </a:solidFill>
+                <a:latin typeface="Calibri"/>
+              </a:rPr>
+              <a:t>Frontend (Catalyst Web Client Hosting):  Copilot · Map · Network · Charts · PDF · RBAC · Light/Dark</a:t>
+            </a:r>
+          </a:p>
+        </p:txBody>
+      </p:sp>
+      <p:sp>
+        <p:nvSpPr>
+          <p:cNvPr id="94" name="TextBox 93"/>
+          <p:cNvSpPr txBox="1"/>
+          <p:nvPr/>
+        </p:nvSpPr>
+        <p:spPr>
+          <a:xfrm>
+            <a:off x="4389120" y="3035808"/>
+            <a:ext cx="365760" cy="292608"/>
+          </a:xfrm>
+          <a:prstGeom prst="rect">
+            <a:avLst/>
+          </a:prstGeom>
+          <a:noFill/>
+        </p:spPr>
+        <p:txBody>
+          <a:bodyPr wrap="square" lIns="45720" tIns="27432">
+            <a:spAutoFit/>
+          </a:bodyPr>
+          <a:lstStyle/>
+          <a:p>
+            <a:pPr algn="ctr">
+              <a:spcAft>
+                <a:spcPts val="500"/>
+              </a:spcAft>
+            </a:pPr>
+            <a:r>
+              <a:rPr sz="1600" b="1">
+                <a:solidFill>
+                  <a:srgbClr val="55637A"/>
+                </a:solidFill>
+                <a:latin typeface="Calibri"/>
+              </a:rPr>
+              <a:t>↓</a:t>
+            </a:r>
+          </a:p>
+        </p:txBody>
+      </p:sp>
+      <p:sp>
+        <p:nvSpPr>
+          <p:cNvPr id="95" name="Rounded Rectangle 94"/>
+          <p:cNvSpPr/>
+          <p:nvPr/>
+        </p:nvSpPr>
+        <p:spPr>
+          <a:xfrm>
+            <a:off x="548640" y="3310128"/>
+            <a:ext cx="8046720" cy="603504"/>
+          </a:xfrm>
+          <a:prstGeom prst="roundRect">
+            <a:avLst/>
+          </a:prstGeom>
+          <a:solidFill>
+            <a:srgbClr val="0D92A6"/>
+          </a:solidFill>
+          <a:ln>
+            <a:noFill/>
+          </a:ln>
+          <a:effectLst/>
+        </p:spPr>
+        <p:style>
+          <a:lnRef idx="1">
+            <a:schemeClr val="accent1"/>
+          </a:lnRef>
+          <a:fillRef idx="3">
+            <a:schemeClr val="accent1"/>
+          </a:fillRef>
+          <a:effectRef idx="2">
+            <a:schemeClr val="accent1"/>
+          </a:effectRef>
+          <a:fontRef idx="minor">
+            <a:schemeClr val="lt1"/>
+          </a:fontRef>
+        </p:style>
+        <p:txBody>
+          <a:bodyPr rtlCol="0" anchor="ctr" wrap="square" lIns="54864" rIns="54864" tIns="18288" bIns="18288"/>
+          <a:lstStyle/>
+          <a:p>
+            <a:pPr algn="ctr"/>
+            <a:r>
+              <a:rPr sz="1150" b="1">
+                <a:solidFill>
+                  <a:srgbClr val="FFFFFF"/>
+                </a:solidFill>
+                <a:latin typeface="Calibri"/>
+              </a:rPr>
+              <a:t>Grounded Engine (isomorphic — browser &amp; Catalyst Function):  parse → retrieve (with citations) → network · geo · forecast · finance · socio</a:t>
+            </a:r>
+          </a:p>
+        </p:txBody>
+      </p:sp>
+      <p:sp>
+        <p:nvSpPr>
+          <p:cNvPr id="96" name="TextBox 95"/>
+          <p:cNvSpPr txBox="1"/>
+          <p:nvPr/>
+        </p:nvSpPr>
+        <p:spPr>
+          <a:xfrm>
+            <a:off x="4389120" y="3877056"/>
+            <a:ext cx="365760" cy="292608"/>
+          </a:xfrm>
+          <a:prstGeom prst="rect">
+            <a:avLst/>
+          </a:prstGeom>
+          <a:noFill/>
+        </p:spPr>
+        <p:txBody>
+          <a:bodyPr wrap="square" lIns="45720" tIns="27432">
+            <a:spAutoFit/>
+          </a:bodyPr>
+          <a:lstStyle/>
+          <a:p>
+            <a:pPr algn="ctr">
+              <a:spcAft>
+                <a:spcPts val="500"/>
+              </a:spcAft>
+            </a:pPr>
+            <a:r>
+              <a:rPr sz="1600" b="1">
+                <a:solidFill>
+                  <a:srgbClr val="55637A"/>
+                </a:solidFill>
+                <a:latin typeface="Calibri"/>
+              </a:rPr>
+              <a:t>↓</a:t>
+            </a:r>
+          </a:p>
+        </p:txBody>
+      </p:sp>
+      <p:sp>
+        <p:nvSpPr>
+          <p:cNvPr id="97" name="Rounded Rectangle 96"/>
+          <p:cNvSpPr/>
+          <p:nvPr/>
+        </p:nvSpPr>
+        <p:spPr>
+          <a:xfrm>
+            <a:off x="548640" y="4151376"/>
+            <a:ext cx="8046720" cy="603504"/>
+          </a:xfrm>
+          <a:prstGeom prst="roundRect">
+            <a:avLst/>
+          </a:prstGeom>
+          <a:solidFill>
+            <a:srgbClr val="5B3DF5"/>
+          </a:solidFill>
+          <a:ln>
+            <a:noFill/>
+          </a:ln>
+          <a:effectLst/>
+        </p:spPr>
+        <p:style>
+          <a:lnRef idx="1">
+            <a:schemeClr val="accent1"/>
+          </a:lnRef>
+          <a:fillRef idx="3">
+            <a:schemeClr val="accent1"/>
+          </a:fillRef>
+          <a:effectRef idx="2">
+            <a:schemeClr val="accent1"/>
+          </a:effectRef>
+          <a:fontRef idx="minor">
+            <a:schemeClr val="lt1"/>
+          </a:fontRef>
+        </p:style>
+        <p:txBody>
+          <a:bodyPr rtlCol="0" anchor="ctr" wrap="square" lIns="54864" rIns="54864" tIns="18288" bIns="18288"/>
+          <a:lstStyle/>
+          <a:p>
+            <a:pPr algn="ctr"/>
+            <a:r>
+              <a:rPr sz="1150" b="1">
+                <a:solidFill>
+                  <a:srgbClr val="FFFFFF"/>
+                </a:solidFill>
+                <a:latin typeface="Calibri"/>
+              </a:rPr>
+              <a:t>Catalyst Services:  Functions · Data Store · QuickML (LLM+RAG) · Zia AutoML · Zia Voice · SmartBrowz · Auth · Circuits</a:t>
+            </a:r>
           </a:p>
         </p:txBody>
       </p:sp>
@@ -8580,6 +10236,244 @@
           </a:p>
         </p:txBody>
       </p:sp>
+      <p:sp>
+        <p:nvSpPr>
+          <p:cNvPr id="97" name="TextBox 96"/>
+          <p:cNvSpPr txBox="1"/>
+          <p:nvPr/>
+        </p:nvSpPr>
+        <p:spPr>
+          <a:xfrm>
+            <a:off x="457200" y="1572768"/>
+            <a:ext cx="3977639" cy="3200400"/>
+          </a:xfrm>
+          <a:prstGeom prst="rect">
+            <a:avLst/>
+          </a:prstGeom>
+          <a:noFill/>
+        </p:spPr>
+        <p:txBody>
+          <a:bodyPr wrap="square" lIns="45720" tIns="27432">
+            <a:spAutoFit/>
+          </a:bodyPr>
+          <a:lstStyle/>
+          <a:p>
+            <a:pPr algn="l">
+              <a:spcAft>
+                <a:spcPts val="600"/>
+              </a:spcAft>
+            </a:pPr>
+            <a:r>
+              <a:rPr sz="1350" b="1">
+                <a:solidFill>
+                  <a:srgbClr val="1E2761"/>
+                </a:solidFill>
+                <a:latin typeface="Calibri"/>
+              </a:rPr>
+              <a:t>Prototype (this build)</a:t>
+            </a:r>
+          </a:p>
+          <a:p>
+            <a:pPr algn="l">
+              <a:spcAft>
+                <a:spcPts val="400"/>
+              </a:spcAft>
+            </a:pPr>
+            <a:r>
+              <a:rPr sz="1200" b="0">
+                <a:solidFill>
+                  <a:srgbClr val="262F40"/>
+                </a:solidFill>
+                <a:latin typeface="Calibri"/>
+              </a:rPr>
+              <a:t>•  Frontend: Vanilla JS, HTML5, CSS3 (no build step)</a:t>
+            </a:r>
+          </a:p>
+          <a:p>
+            <a:pPr algn="l">
+              <a:spcAft>
+                <a:spcPts val="400"/>
+              </a:spcAft>
+            </a:pPr>
+            <a:r>
+              <a:rPr sz="1200" b="0">
+                <a:solidFill>
+                  <a:srgbClr val="262F40"/>
+                </a:solidFill>
+                <a:latin typeface="Calibri"/>
+              </a:rPr>
+              <a:t>•  Maps: Leaflet + heat + CARTO tiles</a:t>
+            </a:r>
+          </a:p>
+          <a:p>
+            <a:pPr algn="l">
+              <a:spcAft>
+                <a:spcPts val="400"/>
+              </a:spcAft>
+            </a:pPr>
+            <a:r>
+              <a:rPr sz="1200" b="0">
+                <a:solidFill>
+                  <a:srgbClr val="262F40"/>
+                </a:solidFill>
+                <a:latin typeface="Calibri"/>
+              </a:rPr>
+              <a:t>•  Graph / Charts: vis-network, Chart.js</a:t>
+            </a:r>
+          </a:p>
+          <a:p>
+            <a:pPr algn="l">
+              <a:spcAft>
+                <a:spcPts val="400"/>
+              </a:spcAft>
+            </a:pPr>
+            <a:r>
+              <a:rPr sz="1200" b="0">
+                <a:solidFill>
+                  <a:srgbClr val="262F40"/>
+                </a:solidFill>
+                <a:latin typeface="Calibri"/>
+              </a:rPr>
+              <a:t>•  PDF: jsPDF · Voice: Web Speech API</a:t>
+            </a:r>
+          </a:p>
+          <a:p>
+            <a:pPr algn="l">
+              <a:spcAft>
+                <a:spcPts val="400"/>
+              </a:spcAft>
+            </a:pPr>
+            <a:r>
+              <a:rPr sz="1200" b="0">
+                <a:solidFill>
+                  <a:srgbClr val="262F40"/>
+                </a:solidFill>
+                <a:latin typeface="Calibri"/>
+              </a:rPr>
+              <a:t>•  Engine: isomorphic JS (browser + Node)</a:t>
+            </a:r>
+          </a:p>
+        </p:txBody>
+      </p:sp>
+      <p:sp>
+        <p:nvSpPr>
+          <p:cNvPr id="98" name="TextBox 97"/>
+          <p:cNvSpPr txBox="1"/>
+          <p:nvPr/>
+        </p:nvSpPr>
+        <p:spPr>
+          <a:xfrm>
+            <a:off x="4617720" y="1572768"/>
+            <a:ext cx="4023360" cy="3200400"/>
+          </a:xfrm>
+          <a:prstGeom prst="rect">
+            <a:avLst/>
+          </a:prstGeom>
+          <a:noFill/>
+        </p:spPr>
+        <p:txBody>
+          <a:bodyPr wrap="square" lIns="45720" tIns="27432">
+            <a:spAutoFit/>
+          </a:bodyPr>
+          <a:lstStyle/>
+          <a:p>
+            <a:pPr algn="l">
+              <a:spcAft>
+                <a:spcPts val="600"/>
+              </a:spcAft>
+            </a:pPr>
+            <a:r>
+              <a:rPr sz="1350" b="1">
+                <a:solidFill>
+                  <a:srgbClr val="0D92A6"/>
+                </a:solidFill>
+                <a:latin typeface="Calibri"/>
+              </a:rPr>
+              <a:t>Production (Catalyst by Zoho)</a:t>
+            </a:r>
+          </a:p>
+          <a:p>
+            <a:pPr algn="l">
+              <a:spcAft>
+                <a:spcPts val="400"/>
+              </a:spcAft>
+            </a:pPr>
+            <a:r>
+              <a:rPr sz="1200" b="0">
+                <a:solidFill>
+                  <a:srgbClr val="262F40"/>
+                </a:solidFill>
+                <a:latin typeface="Calibri"/>
+              </a:rPr>
+              <a:t>•  Web Client Hosting (frontend) + Serverless Functions</a:t>
+            </a:r>
+          </a:p>
+          <a:p>
+            <a:pPr algn="l">
+              <a:spcAft>
+                <a:spcPts val="400"/>
+              </a:spcAft>
+            </a:pPr>
+            <a:r>
+              <a:rPr sz="1200" b="0">
+                <a:solidFill>
+                  <a:srgbClr val="262F40"/>
+                </a:solidFill>
+                <a:latin typeface="Calibri"/>
+              </a:rPr>
+              <a:t>•  Data Store (FIR/CCTNS) + full-text search</a:t>
+            </a:r>
+          </a:p>
+          <a:p>
+            <a:pPr algn="l">
+              <a:spcAft>
+                <a:spcPts val="400"/>
+              </a:spcAft>
+            </a:pPr>
+            <a:r>
+              <a:rPr sz="1200" b="0">
+                <a:solidFill>
+                  <a:srgbClr val="262F40"/>
+                </a:solidFill>
+                <a:latin typeface="Calibri"/>
+              </a:rPr>
+              <a:t>•  QuickML — LLM + RAG (conversational AI)</a:t>
+            </a:r>
+          </a:p>
+          <a:p>
+            <a:pPr algn="l">
+              <a:spcAft>
+                <a:spcPts val="400"/>
+              </a:spcAft>
+            </a:pPr>
+            <a:r>
+              <a:rPr sz="1200" b="0">
+                <a:solidFill>
+                  <a:srgbClr val="262F40"/>
+                </a:solidFill>
+                <a:latin typeface="Calibri"/>
+              </a:rPr>
+              <a:t>•  Zia AutoML (risk/forecast) · Zia Services (voice)</a:t>
+            </a:r>
+          </a:p>
+          <a:p>
+            <a:pPr algn="l">
+              <a:spcAft>
+                <a:spcPts val="400"/>
+              </a:spcAft>
+            </a:pPr>
+            <a:r>
+              <a:rPr sz="1200" b="0">
+                <a:solidFill>
+                  <a:srgbClr val="262F40"/>
+                </a:solidFill>
+                <a:latin typeface="Calibri"/>
+              </a:rPr>
+              <a:t>•  SmartBrowz (PDF) · Authentication (RBAC) · Circuits</a:t>
+            </a:r>
+          </a:p>
+        </p:txBody>
+      </p:sp>
     </p:spTree>
   </p:cSld>
   <p:clrMapOvr>
@@ -8672,6 +10566,329 @@
               <a:t>List down Catalyst Services being used in the solution</a:t>
             </a:r>
             <a:endParaRPr b="1" sz="1800"/>
+          </a:p>
+        </p:txBody>
+      </p:sp>
+      <p:sp>
+        <p:nvSpPr>
+          <p:cNvPr id="103" name="TextBox 102"/>
+          <p:cNvSpPr txBox="1"/>
+          <p:nvPr/>
+        </p:nvSpPr>
+        <p:spPr>
+          <a:xfrm>
+            <a:off x="457200" y="1572768"/>
+            <a:ext cx="8229600" cy="3246120"/>
+          </a:xfrm>
+          <a:prstGeom prst="rect">
+            <a:avLst/>
+          </a:prstGeom>
+          <a:noFill/>
+        </p:spPr>
+        <p:txBody>
+          <a:bodyPr wrap="square" lIns="45720" tIns="27432">
+            <a:spAutoFit/>
+          </a:bodyPr>
+          <a:lstStyle/>
+          <a:p>
+            <a:pPr>
+              <a:spcAft>
+                <a:spcPts val="300"/>
+              </a:spcAft>
+            </a:pPr>
+            <a:r>
+              <a:rPr sz="1200">
+                <a:solidFill>
+                  <a:srgbClr val="262F40"/>
+                </a:solidFill>
+                <a:latin typeface="Calibri"/>
+              </a:rPr>
+              <a:t>•  Frontend / SPA  →  </a:t>
+            </a:r>
+            <a:r>
+              <a:rPr sz="1200" b="1">
+                <a:solidFill>
+                  <a:srgbClr val="0D92A6"/>
+                </a:solidFill>
+                <a:latin typeface="Calibri"/>
+              </a:rPr>
+              <a:t>Web Client Hosting</a:t>
+            </a:r>
+          </a:p>
+          <a:p>
+            <a:pPr>
+              <a:spcAft>
+                <a:spcPts val="300"/>
+              </a:spcAft>
+            </a:pPr>
+            <a:r>
+              <a:rPr sz="1200">
+                <a:solidFill>
+                  <a:srgbClr val="262F40"/>
+                </a:solidFill>
+                <a:latin typeface="Calibri"/>
+              </a:rPr>
+              <a:t>•  Backend logic / API  →  </a:t>
+            </a:r>
+            <a:r>
+              <a:rPr sz="1200" b="1">
+                <a:solidFill>
+                  <a:srgbClr val="0D92A6"/>
+                </a:solidFill>
+                <a:latin typeface="Calibri"/>
+              </a:rPr>
+              <a:t>Serverless Functions</a:t>
+            </a:r>
+          </a:p>
+          <a:p>
+            <a:pPr>
+              <a:spcAft>
+                <a:spcPts val="300"/>
+              </a:spcAft>
+            </a:pPr>
+            <a:r>
+              <a:rPr sz="1200">
+                <a:solidFill>
+                  <a:srgbClr val="262F40"/>
+                </a:solidFill>
+                <a:latin typeface="Calibri"/>
+              </a:rPr>
+              <a:t>•  Crime database + search  →  </a:t>
+            </a:r>
+            <a:r>
+              <a:rPr sz="1200" b="1">
+                <a:solidFill>
+                  <a:srgbClr val="0D92A6"/>
+                </a:solidFill>
+                <a:latin typeface="Calibri"/>
+              </a:rPr>
+              <a:t>Data Store</a:t>
+            </a:r>
+          </a:p>
+          <a:p>
+            <a:pPr>
+              <a:spcAft>
+                <a:spcPts val="300"/>
+              </a:spcAft>
+            </a:pPr>
+            <a:r>
+              <a:rPr sz="1200">
+                <a:solidFill>
+                  <a:srgbClr val="262F40"/>
+                </a:solidFill>
+                <a:latin typeface="Calibri"/>
+              </a:rPr>
+              <a:t>•  Conversational AI + RAG  →  </a:t>
+            </a:r>
+            <a:r>
+              <a:rPr sz="1200" b="1">
+                <a:solidFill>
+                  <a:srgbClr val="0D92A6"/>
+                </a:solidFill>
+                <a:latin typeface="Calibri"/>
+              </a:rPr>
+              <a:t>QuickML (LLM Serving, RAG)</a:t>
+            </a:r>
+          </a:p>
+          <a:p>
+            <a:pPr>
+              <a:spcAft>
+                <a:spcPts val="300"/>
+              </a:spcAft>
+            </a:pPr>
+            <a:r>
+              <a:rPr sz="1200">
+                <a:solidFill>
+                  <a:srgbClr val="262F40"/>
+                </a:solidFill>
+                <a:latin typeface="Calibri"/>
+              </a:rPr>
+              <a:t>•  Risk / forecast models  →  </a:t>
+            </a:r>
+            <a:r>
+              <a:rPr sz="1200" b="1">
+                <a:solidFill>
+                  <a:srgbClr val="0D92A6"/>
+                </a:solidFill>
+                <a:latin typeface="Calibri"/>
+              </a:rPr>
+              <a:t>Zia AutoML</a:t>
+            </a:r>
+          </a:p>
+          <a:p>
+            <a:pPr>
+              <a:spcAft>
+                <a:spcPts val="300"/>
+              </a:spcAft>
+            </a:pPr>
+            <a:r>
+              <a:rPr sz="1200">
+                <a:solidFill>
+                  <a:srgbClr val="262F40"/>
+                </a:solidFill>
+                <a:latin typeface="Calibri"/>
+              </a:rPr>
+              <a:t>•  Voice (STT / TTS / translate)  →  </a:t>
+            </a:r>
+            <a:r>
+              <a:rPr sz="1200" b="1">
+                <a:solidFill>
+                  <a:srgbClr val="0D92A6"/>
+                </a:solidFill>
+                <a:latin typeface="Calibri"/>
+              </a:rPr>
+              <a:t>Zia Services</a:t>
+            </a:r>
+          </a:p>
+          <a:p>
+            <a:pPr>
+              <a:spcAft>
+                <a:spcPts val="300"/>
+              </a:spcAft>
+            </a:pPr>
+            <a:r>
+              <a:rPr sz="1200">
+                <a:solidFill>
+                  <a:srgbClr val="262F40"/>
+                </a:solidFill>
+                <a:latin typeface="Calibri"/>
+              </a:rPr>
+              <a:t>•  PDF report generation  →  </a:t>
+            </a:r>
+            <a:r>
+              <a:rPr sz="1200" b="1">
+                <a:solidFill>
+                  <a:srgbClr val="0D92A6"/>
+                </a:solidFill>
+                <a:latin typeface="Calibri"/>
+              </a:rPr>
+              <a:t>SmartBrowz</a:t>
+            </a:r>
+          </a:p>
+          <a:p>
+            <a:pPr>
+              <a:spcAft>
+                <a:spcPts val="300"/>
+              </a:spcAft>
+            </a:pPr>
+            <a:r>
+              <a:rPr sz="1200">
+                <a:solidFill>
+                  <a:srgbClr val="262F40"/>
+                </a:solidFill>
+                <a:latin typeface="Calibri"/>
+              </a:rPr>
+              <a:t>•  Login + role-based access  →  </a:t>
+            </a:r>
+            <a:r>
+              <a:rPr sz="1200" b="1">
+                <a:solidFill>
+                  <a:srgbClr val="0D92A6"/>
+                </a:solidFill>
+                <a:latin typeface="Calibri"/>
+              </a:rPr>
+              <a:t>Authentication</a:t>
+            </a:r>
+          </a:p>
+          <a:p>
+            <a:pPr>
+              <a:spcAft>
+                <a:spcPts val="300"/>
+              </a:spcAft>
+            </a:pPr>
+            <a:r>
+              <a:rPr sz="1200">
+                <a:solidFill>
+                  <a:srgbClr val="262F40"/>
+                </a:solidFill>
+                <a:latin typeface="Calibri"/>
+              </a:rPr>
+              <a:t>•  Autonomous pipeline  →  </a:t>
+            </a:r>
+            <a:r>
+              <a:rPr sz="1200" b="1">
+                <a:solidFill>
+                  <a:srgbClr val="0D92A6"/>
+                </a:solidFill>
+                <a:latin typeface="Calibri"/>
+              </a:rPr>
+              <a:t>Circuits</a:t>
+            </a:r>
+          </a:p>
+          <a:p>
+            <a:pPr>
+              <a:spcAft>
+                <a:spcPts val="300"/>
+              </a:spcAft>
+            </a:pPr>
+            <a:r>
+              <a:rPr sz="1200">
+                <a:solidFill>
+                  <a:srgbClr val="262F40"/>
+                </a:solidFill>
+                <a:latin typeface="Calibri"/>
+              </a:rPr>
+              <a:t>•  Early-warning alerts  →  </a:t>
+            </a:r>
+            <a:r>
+              <a:rPr sz="1200" b="1">
+                <a:solidFill>
+                  <a:srgbClr val="0D92A6"/>
+                </a:solidFill>
+                <a:latin typeface="Calibri"/>
+              </a:rPr>
+              <a:t>Cron + Push Notifications + Mail</a:t>
+            </a:r>
+          </a:p>
+          <a:p>
+            <a:pPr>
+              <a:spcAft>
+                <a:spcPts val="300"/>
+              </a:spcAft>
+            </a:pPr>
+            <a:r>
+              <a:rPr sz="1200">
+                <a:solidFill>
+                  <a:srgbClr val="262F40"/>
+                </a:solidFill>
+                <a:latin typeface="Calibri"/>
+              </a:rPr>
+              <a:t>•  Event-driven re-analysis  →  </a:t>
+            </a:r>
+            <a:r>
+              <a:rPr sz="1200" b="1">
+                <a:solidFill>
+                  <a:srgbClr val="0D92A6"/>
+                </a:solidFill>
+                <a:latin typeface="Calibri"/>
+              </a:rPr>
+              <a:t>Signals + Event Functions</a:t>
+            </a:r>
+          </a:p>
+          <a:p>
+            <a:pPr>
+              <a:spcAft>
+                <a:spcPts val="300"/>
+              </a:spcAft>
+            </a:pPr>
+            <a:r>
+              <a:rPr sz="1200">
+                <a:solidFill>
+                  <a:srgbClr val="262F40"/>
+                </a:solidFill>
+                <a:latin typeface="Calibri"/>
+              </a:rPr>
+              <a:t>•  API security / throttling  →  </a:t>
+            </a:r>
+            <a:r>
+              <a:rPr sz="1200" b="1">
+                <a:solidFill>
+                  <a:srgbClr val="0D92A6"/>
+                </a:solidFill>
+                <a:latin typeface="Calibri"/>
+              </a:rPr>
+              <a:t>API Gateway</a:t>
+            </a:r>
           </a:p>
         </p:txBody>
       </p:sp>
